--- a/Banner.pptx
+++ b/Banner.pptx
@@ -6,6 +6,7 @@
   </p:sldMasterIdLst>
   <p:sldIdLst>
     <p:sldId id="256" r:id="rId2"/>
+    <p:sldId id="257" r:id="rId3"/>
   </p:sldIdLst>
   <p:sldSz cx="12192000" cy="6858000"/>
   <p:notesSz cx="6858000" cy="9144000"/>
@@ -104,6 +105,11 @@
       </a:defRPr>
     </a:lvl9pPr>
   </p:defaultTextStyle>
+  <p:extLst>
+    <p:ext uri="{EFAFB233-063F-42B5-8137-9DF3F51BA10A}">
+      <p15:sldGuideLst xmlns:p15="http://schemas.microsoft.com/office/powerpoint/2012/main"/>
+    </p:ext>
+  </p:extLst>
 </p:presentation>
 </file>
 
@@ -254,7 +260,7 @@
           <a:p>
             <a:fld id="{6793E8E1-1E84-45FF-A9C2-9C78775763FE}" type="datetimeFigureOut">
               <a:rPr lang="en-US" smtClean="0"/>
-              <a:t>8/2/2025</a:t>
+              <a:t>8/16/2025</a:t>
             </a:fld>
             <a:endParaRPr lang="en-US"/>
           </a:p>
@@ -452,7 +458,7 @@
           <a:p>
             <a:fld id="{6793E8E1-1E84-45FF-A9C2-9C78775763FE}" type="datetimeFigureOut">
               <a:rPr lang="en-US" smtClean="0"/>
-              <a:t>8/2/2025</a:t>
+              <a:t>8/16/2025</a:t>
             </a:fld>
             <a:endParaRPr lang="en-US"/>
           </a:p>
@@ -660,7 +666,7 @@
           <a:p>
             <a:fld id="{6793E8E1-1E84-45FF-A9C2-9C78775763FE}" type="datetimeFigureOut">
               <a:rPr lang="en-US" smtClean="0"/>
-              <a:t>8/2/2025</a:t>
+              <a:t>8/16/2025</a:t>
             </a:fld>
             <a:endParaRPr lang="en-US"/>
           </a:p>
@@ -858,7 +864,7 @@
           <a:p>
             <a:fld id="{6793E8E1-1E84-45FF-A9C2-9C78775763FE}" type="datetimeFigureOut">
               <a:rPr lang="en-US" smtClean="0"/>
-              <a:t>8/2/2025</a:t>
+              <a:t>8/16/2025</a:t>
             </a:fld>
             <a:endParaRPr lang="en-US"/>
           </a:p>
@@ -1133,7 +1139,7 @@
           <a:p>
             <a:fld id="{6793E8E1-1E84-45FF-A9C2-9C78775763FE}" type="datetimeFigureOut">
               <a:rPr lang="en-US" smtClean="0"/>
-              <a:t>8/2/2025</a:t>
+              <a:t>8/16/2025</a:t>
             </a:fld>
             <a:endParaRPr lang="en-US"/>
           </a:p>
@@ -1398,7 +1404,7 @@
           <a:p>
             <a:fld id="{6793E8E1-1E84-45FF-A9C2-9C78775763FE}" type="datetimeFigureOut">
               <a:rPr lang="en-US" smtClean="0"/>
-              <a:t>8/2/2025</a:t>
+              <a:t>8/16/2025</a:t>
             </a:fld>
             <a:endParaRPr lang="en-US"/>
           </a:p>
@@ -1810,7 +1816,7 @@
           <a:p>
             <a:fld id="{6793E8E1-1E84-45FF-A9C2-9C78775763FE}" type="datetimeFigureOut">
               <a:rPr lang="en-US" smtClean="0"/>
-              <a:t>8/2/2025</a:t>
+              <a:t>8/16/2025</a:t>
             </a:fld>
             <a:endParaRPr lang="en-US"/>
           </a:p>
@@ -1951,7 +1957,7 @@
           <a:p>
             <a:fld id="{6793E8E1-1E84-45FF-A9C2-9C78775763FE}" type="datetimeFigureOut">
               <a:rPr lang="en-US" smtClean="0"/>
-              <a:t>8/2/2025</a:t>
+              <a:t>8/16/2025</a:t>
             </a:fld>
             <a:endParaRPr lang="en-US"/>
           </a:p>
@@ -2064,7 +2070,7 @@
           <a:p>
             <a:fld id="{6793E8E1-1E84-45FF-A9C2-9C78775763FE}" type="datetimeFigureOut">
               <a:rPr lang="en-US" smtClean="0"/>
-              <a:t>8/2/2025</a:t>
+              <a:t>8/16/2025</a:t>
             </a:fld>
             <a:endParaRPr lang="en-US"/>
           </a:p>
@@ -2375,7 +2381,7 @@
           <a:p>
             <a:fld id="{6793E8E1-1E84-45FF-A9C2-9C78775763FE}" type="datetimeFigureOut">
               <a:rPr lang="en-US" smtClean="0"/>
-              <a:t>8/2/2025</a:t>
+              <a:t>8/16/2025</a:t>
             </a:fld>
             <a:endParaRPr lang="en-US"/>
           </a:p>
@@ -2663,7 +2669,7 @@
           <a:p>
             <a:fld id="{6793E8E1-1E84-45FF-A9C2-9C78775763FE}" type="datetimeFigureOut">
               <a:rPr lang="en-US" smtClean="0"/>
-              <a:t>8/2/2025</a:t>
+              <a:t>8/16/2025</a:t>
             </a:fld>
             <a:endParaRPr lang="en-US"/>
           </a:p>
@@ -2904,7 +2910,7 @@
           <a:p>
             <a:fld id="{6793E8E1-1E84-45FF-A9C2-9C78775763FE}" type="datetimeFigureOut">
               <a:rPr lang="en-US" smtClean="0"/>
-              <a:t>8/2/2025</a:t>
+              <a:t>8/16/2025</a:t>
             </a:fld>
             <a:endParaRPr lang="en-US"/>
           </a:p>
@@ -3323,14 +3329,16 @@
       </p:grpSpPr>
       <p:grpSp>
         <p:nvGrpSpPr>
-          <p:cNvPr id="19" name="Group 18">
-            <a:extLst>
-              <a:ext uri="{FF2B5EF4-FFF2-40B4-BE49-F238E27FC236}">
-                <a16:creationId xmlns:a16="http://schemas.microsoft.com/office/drawing/2014/main" id="{AD11A918-01EF-0372-41C4-FFC377A4C316}"/>
-              </a:ext>
-            </a:extLst>
-          </p:cNvPr>
-          <p:cNvGrpSpPr/>
+          <p:cNvPr id="4" name="Group 3">
+            <a:extLst>
+              <a:ext uri="{FF2B5EF4-FFF2-40B4-BE49-F238E27FC236}">
+                <a16:creationId xmlns:a16="http://schemas.microsoft.com/office/drawing/2014/main" id="{B9A19E25-0070-723D-F15D-4DC91E2266BE}"/>
+              </a:ext>
+            </a:extLst>
+          </p:cNvPr>
+          <p:cNvGrpSpPr>
+            <a:grpSpLocks noChangeAspect="1"/>
+          </p:cNvGrpSpPr>
           <p:nvPr/>
         </p:nvGrpSpPr>
         <p:grpSpPr>
@@ -3427,10 +3435,10 @@
         </p:sp>
         <p:grpSp>
           <p:nvGrpSpPr>
-            <p:cNvPr id="17" name="Group 16">
+            <p:cNvPr id="3" name="Group 2">
               <a:extLst>
                 <a:ext uri="{FF2B5EF4-FFF2-40B4-BE49-F238E27FC236}">
-                  <a16:creationId xmlns:a16="http://schemas.microsoft.com/office/drawing/2014/main" id="{DAE0ED0D-255F-8417-7D90-8EBE35FC814B}"/>
+                  <a16:creationId xmlns:a16="http://schemas.microsoft.com/office/drawing/2014/main" id="{86083742-DEE4-5F33-46E6-17341C92D85F}"/>
                 </a:ext>
               </a:extLst>
             </p:cNvPr>
@@ -3443,89 +3451,259 @@
             <a:xfrm>
               <a:off x="320959" y="1143000"/>
               <a:ext cx="11550080" cy="4572000"/>
-              <a:chOff x="2071923" y="1783080"/>
-              <a:chExt cx="8316058" cy="3291840"/>
+              <a:chOff x="320959" y="1143000"/>
+              <a:chExt cx="11550080" cy="4572000"/>
             </a:xfrm>
           </p:grpSpPr>
-          <p:pic>
-            <p:nvPicPr>
-              <p:cNvPr id="9" name="Picture 8" descr="A logo with a black background&#10;&#10;AI-generated content may be incorrect.">
+          <p:grpSp>
+            <p:nvGrpSpPr>
+              <p:cNvPr id="17" name="Group 16">
                 <a:extLst>
                   <a:ext uri="{FF2B5EF4-FFF2-40B4-BE49-F238E27FC236}">
-                    <a16:creationId xmlns:a16="http://schemas.microsoft.com/office/drawing/2014/main" id="{12679C7B-1281-AD02-D22C-4E5D280A777C}"/>
+                    <a16:creationId xmlns:a16="http://schemas.microsoft.com/office/drawing/2014/main" id="{DAE0ED0D-255F-8417-7D90-8EBE35FC814B}"/>
                   </a:ext>
                 </a:extLst>
               </p:cNvPr>
-              <p:cNvPicPr>
-                <a:picLocks noChangeAspect="1"/>
-              </p:cNvPicPr>
+              <p:cNvGrpSpPr>
+                <a:grpSpLocks noChangeAspect="1"/>
+              </p:cNvGrpSpPr>
               <p:nvPr/>
-            </p:nvPicPr>
-            <p:blipFill>
-              <a:blip r:embed="rId3">
+            </p:nvGrpSpPr>
+            <p:grpSpPr>
+              <a:xfrm>
+                <a:off x="320959" y="1143000"/>
+                <a:ext cx="11550080" cy="4572000"/>
+                <a:chOff x="2071923" y="1783080"/>
+                <a:chExt cx="8316058" cy="3291840"/>
+              </a:xfrm>
+            </p:grpSpPr>
+            <p:pic>
+              <p:nvPicPr>
+                <p:cNvPr id="9" name="Picture 8" descr="A logo with a black background&#10;&#10;AI-generated content may be incorrect.">
+                  <a:extLst>
+                    <a:ext uri="{FF2B5EF4-FFF2-40B4-BE49-F238E27FC236}">
+                      <a16:creationId xmlns:a16="http://schemas.microsoft.com/office/drawing/2014/main" id="{12679C7B-1281-AD02-D22C-4E5D280A777C}"/>
+                    </a:ext>
+                  </a:extLst>
+                </p:cNvPr>
+                <p:cNvPicPr>
+                  <a:picLocks noChangeAspect="1"/>
+                </p:cNvPicPr>
+                <p:nvPr/>
+              </p:nvPicPr>
+              <p:blipFill>
+                <a:blip r:embed="rId3">
+                  <a:extLst>
+                    <a:ext uri="{28A0092B-C50C-407E-A947-70E740481C1C}">
+                      <a14:useLocalDpi xmlns:a14="http://schemas.microsoft.com/office/drawing/2010/main" val="0"/>
+                    </a:ext>
+                  </a:extLst>
+                </a:blip>
+                <a:stretch>
+                  <a:fillRect/>
+                </a:stretch>
+              </p:blipFill>
+              <p:spPr>
+                <a:xfrm>
+                  <a:off x="2071923" y="1783080"/>
+                  <a:ext cx="3291840" cy="3291840"/>
+                </a:xfrm>
+                <a:prstGeom prst="rect">
+                  <a:avLst/>
+                </a:prstGeom>
+              </p:spPr>
+            </p:pic>
+            <p:pic>
+              <p:nvPicPr>
+                <p:cNvPr id="11" name="Picture 10" descr="A yellow exclamation mark on a black background&#10;&#10;AI-generated content may be incorrect.">
+                  <a:extLst>
+                    <a:ext uri="{FF2B5EF4-FFF2-40B4-BE49-F238E27FC236}">
+                      <a16:creationId xmlns:a16="http://schemas.microsoft.com/office/drawing/2014/main" id="{F54CDFE4-720B-AFB0-91DE-B23A2C508B0F}"/>
+                    </a:ext>
+                  </a:extLst>
+                </p:cNvPr>
+                <p:cNvPicPr>
+                  <a:picLocks noChangeAspect="1"/>
+                </p:cNvPicPr>
+                <p:nvPr/>
+              </p:nvPicPr>
+              <p:blipFill>
+                <a:blip r:embed="rId4">
+                  <a:extLst>
+                    <a:ext uri="{28A0092B-C50C-407E-A947-70E740481C1C}">
+                      <a14:useLocalDpi xmlns:a14="http://schemas.microsoft.com/office/drawing/2010/main" val="0"/>
+                    </a:ext>
+                  </a:extLst>
+                </a:blip>
+                <a:stretch>
+                  <a:fillRect/>
+                </a:stretch>
+              </p:blipFill>
+              <p:spPr>
+                <a:xfrm>
+                  <a:off x="7096141" y="2057400"/>
+                  <a:ext cx="3291840" cy="2743200"/>
+                </a:xfrm>
+                <a:prstGeom prst="rect">
+                  <a:avLst/>
+                </a:prstGeom>
+              </p:spPr>
+            </p:pic>
+          </p:grpSp>
+          <p:sp>
+            <p:nvSpPr>
+              <p:cNvPr id="14" name="Rectangle 13">
                 <a:extLst>
-                  <a:ext uri="{28A0092B-C50C-407E-A947-70E740481C1C}">
-                    <a14:useLocalDpi xmlns:a14="http://schemas.microsoft.com/office/drawing/2010/main" val="0"/>
+                  <a:ext uri="{FF2B5EF4-FFF2-40B4-BE49-F238E27FC236}">
+                    <a16:creationId xmlns:a16="http://schemas.microsoft.com/office/drawing/2014/main" id="{57416794-7100-8852-B87A-AEBF231F0C02}"/>
                   </a:ext>
                 </a:extLst>
-              </a:blip>
-              <a:stretch>
-                <a:fillRect/>
-              </a:stretch>
-            </p:blipFill>
+              </p:cNvPr>
+              <p:cNvSpPr/>
+              <p:nvPr/>
+            </p:nvSpPr>
             <p:spPr>
               <a:xfrm>
-                <a:off x="2071923" y="1783080"/>
-                <a:ext cx="3291840" cy="3291840"/>
+                <a:off x="5295139" y="1843950"/>
+                <a:ext cx="1601722" cy="3170099"/>
               </a:xfrm>
               <a:prstGeom prst="rect">
                 <a:avLst/>
               </a:prstGeom>
+              <a:noFill/>
             </p:spPr>
-          </p:pic>
-          <p:pic>
-            <p:nvPicPr>
-              <p:cNvPr id="11" name="Picture 10" descr="A yellow exclamation mark on a black background&#10;&#10;AI-generated content may be incorrect.">
-                <a:extLst>
-                  <a:ext uri="{FF2B5EF4-FFF2-40B4-BE49-F238E27FC236}">
-                    <a16:creationId xmlns:a16="http://schemas.microsoft.com/office/drawing/2014/main" id="{F54CDFE4-720B-AFB0-91DE-B23A2C508B0F}"/>
-                  </a:ext>
-                </a:extLst>
-              </p:cNvPr>
-              <p:cNvPicPr>
-                <a:picLocks noChangeAspect="1"/>
-              </p:cNvPicPr>
-              <p:nvPr/>
-            </p:nvPicPr>
-            <p:blipFill>
-              <a:blip r:embed="rId4">
-                <a:extLst>
-                  <a:ext uri="{28A0092B-C50C-407E-A947-70E740481C1C}">
-                    <a14:useLocalDpi xmlns:a14="http://schemas.microsoft.com/office/drawing/2010/main" val="0"/>
-                  </a:ext>
-                </a:extLst>
-              </a:blip>
-              <a:stretch>
-                <a:fillRect/>
-              </a:stretch>
-            </p:blipFill>
-            <p:spPr>
-              <a:xfrm>
-                <a:off x="7096141" y="2057400"/>
-                <a:ext cx="3291840" cy="2743200"/>
-              </a:xfrm>
-              <a:prstGeom prst="rect">
-                <a:avLst/>
-              </a:prstGeom>
-            </p:spPr>
-          </p:pic>
+            <p:txBody>
+              <a:bodyPr wrap="none" lIns="91440" tIns="45720" rIns="91440" bIns="45720">
+                <a:spAutoFit/>
+              </a:bodyPr>
+              <a:lstStyle/>
+              <a:p>
+                <a:pPr algn="ctr"/>
+                <a:r>
+                  <a:rPr lang="en-US" sz="20000" b="0" cap="none" spc="0" dirty="0">
+                    <a:ln w="0"/>
+                    <a:gradFill flip="none" rotWithShape="1">
+                      <a:gsLst>
+                        <a:gs pos="0">
+                          <a:srgbClr val="008DD2"/>
+                        </a:gs>
+                        <a:gs pos="100000">
+                          <a:srgbClr val="FFCC00"/>
+                        </a:gs>
+                      </a:gsLst>
+                      <a:lin ang="0" scaled="1"/>
+                      <a:tileRect/>
+                    </a:gradFill>
+                    <a:effectLst>
+                      <a:outerShdw blurRad="38100" dist="19050" dir="2700000" algn="tl" rotWithShape="0">
+                        <a:schemeClr val="dk1">
+                          <a:alpha val="40000"/>
+                        </a:schemeClr>
+                      </a:outerShdw>
+                    </a:effectLst>
+                  </a:rPr>
+                  <a:t>X</a:t>
+                </a:r>
+              </a:p>
+            </p:txBody>
+          </p:sp>
         </p:grpSp>
+      </p:grpSp>
+    </p:spTree>
+    <p:extLst>
+      <p:ext uri="{BB962C8B-B14F-4D97-AF65-F5344CB8AC3E}">
+        <p14:creationId xmlns:p14="http://schemas.microsoft.com/office/powerpoint/2010/main" val="2717747057"/>
+      </p:ext>
+    </p:extLst>
+  </p:cSld>
+  <p:clrMapOvr>
+    <a:masterClrMapping/>
+  </p:clrMapOvr>
+</p:sld>
+</file>
+
+<file path=ppt/slides/slide2.xml><?xml version="1.0" encoding="utf-8"?>
+<p:sld xmlns:a="http://schemas.openxmlformats.org/drawingml/2006/main" xmlns:r="http://schemas.openxmlformats.org/officeDocument/2006/relationships" xmlns:p="http://schemas.openxmlformats.org/presentationml/2006/main">
+  <p:cSld>
+    <p:spTree>
+      <p:nvGrpSpPr>
+        <p:cNvPr id="1" name="">
+          <a:extLst>
+            <a:ext uri="{FF2B5EF4-FFF2-40B4-BE49-F238E27FC236}">
+              <a16:creationId xmlns:a16="http://schemas.microsoft.com/office/drawing/2014/main" id="{1BDD2DB3-C0EF-8007-692C-8B8309BE77FE}"/>
+            </a:ext>
+          </a:extLst>
+        </p:cNvPr>
+        <p:cNvGrpSpPr/>
+        <p:nvPr/>
+      </p:nvGrpSpPr>
+      <p:grpSpPr>
+        <a:xfrm>
+          <a:off x="0" y="0"/>
+          <a:ext cx="0" cy="0"/>
+          <a:chOff x="0" y="0"/>
+          <a:chExt cx="0" cy="0"/>
+        </a:xfrm>
+      </p:grpSpPr>
+      <p:grpSp>
+        <p:nvGrpSpPr>
+          <p:cNvPr id="13" name="Group 12">
+            <a:extLst>
+              <a:ext uri="{FF2B5EF4-FFF2-40B4-BE49-F238E27FC236}">
+                <a16:creationId xmlns:a16="http://schemas.microsoft.com/office/drawing/2014/main" id="{3633550C-E502-0D56-0D3C-6BD4585E74F6}"/>
+              </a:ext>
+            </a:extLst>
+          </p:cNvPr>
+          <p:cNvGrpSpPr>
+            <a:grpSpLocks noChangeAspect="1"/>
+          </p:cNvGrpSpPr>
+          <p:nvPr/>
+        </p:nvGrpSpPr>
+        <p:grpSpPr>
+          <a:xfrm>
+            <a:off x="0" y="2347049"/>
+            <a:ext cx="12192000" cy="3048000"/>
+            <a:chOff x="0" y="2347049"/>
+            <a:chExt cx="12192000" cy="3048000"/>
+          </a:xfrm>
+        </p:grpSpPr>
+        <p:pic>
+          <p:nvPicPr>
+            <p:cNvPr id="18" name="Picture 17">
+              <a:extLst>
+                <a:ext uri="{FF2B5EF4-FFF2-40B4-BE49-F238E27FC236}">
+                  <a16:creationId xmlns:a16="http://schemas.microsoft.com/office/drawing/2014/main" id="{1F2DFB47-B899-AA90-7F5F-4F24C59C49B7}"/>
+                </a:ext>
+              </a:extLst>
+            </p:cNvPr>
+            <p:cNvPicPr>
+              <a:picLocks noChangeAspect="1"/>
+            </p:cNvPicPr>
+            <p:nvPr/>
+          </p:nvPicPr>
+          <p:blipFill>
+            <a:blip r:embed="rId2"/>
+            <a:srcRect t="35194" b="20361"/>
+            <a:stretch>
+              <a:fillRect/>
+            </a:stretch>
+          </p:blipFill>
+          <p:spPr>
+            <a:xfrm>
+              <a:off x="0" y="2347049"/>
+              <a:ext cx="12192000" cy="3048000"/>
+            </a:xfrm>
+            <a:prstGeom prst="rect">
+              <a:avLst/>
+            </a:prstGeom>
+          </p:spPr>
+        </p:pic>
         <p:sp>
           <p:nvSpPr>
-            <p:cNvPr id="14" name="Rectangle 13">
+            <p:cNvPr id="15" name="Rectangle 14">
               <a:extLst>
                 <a:ext uri="{FF2B5EF4-FFF2-40B4-BE49-F238E27FC236}">
-                  <a16:creationId xmlns:a16="http://schemas.microsoft.com/office/drawing/2014/main" id="{57416794-7100-8852-B87A-AEBF231F0C02}"/>
+                  <a16:creationId xmlns:a16="http://schemas.microsoft.com/office/drawing/2014/main" id="{98C0ECA9-812C-560E-2686-BFD0C4BF62C4}"/>
                 </a:ext>
               </a:extLst>
             </p:cNvPr>
@@ -3534,54 +3712,226 @@
           </p:nvSpPr>
           <p:spPr>
             <a:xfrm>
-              <a:off x="5295139" y="1843950"/>
-              <a:ext cx="1601722" cy="3170099"/>
+              <a:off x="0" y="2347049"/>
+              <a:ext cx="12192000" cy="3048000"/>
             </a:xfrm>
             <a:prstGeom prst="rect">
               <a:avLst/>
             </a:prstGeom>
-            <a:noFill/>
+            <a:solidFill>
+              <a:srgbClr val="FFFFFF">
+                <a:alpha val="67059"/>
+              </a:srgbClr>
+            </a:solidFill>
+            <a:ln>
+              <a:noFill/>
+            </a:ln>
           </p:spPr>
+          <p:style>
+            <a:lnRef idx="2">
+              <a:schemeClr val="accent1">
+                <a:shade val="15000"/>
+              </a:schemeClr>
+            </a:lnRef>
+            <a:fillRef idx="1">
+              <a:schemeClr val="accent1"/>
+            </a:fillRef>
+            <a:effectRef idx="0">
+              <a:schemeClr val="accent1"/>
+            </a:effectRef>
+            <a:fontRef idx="minor">
+              <a:schemeClr val="lt1"/>
+            </a:fontRef>
+          </p:style>
           <p:txBody>
-            <a:bodyPr wrap="none" lIns="91440" tIns="45720" rIns="91440" bIns="45720">
-              <a:spAutoFit/>
-            </a:bodyPr>
+            <a:bodyPr rtlCol="0" anchor="ctr"/>
             <a:lstStyle/>
             <a:p>
               <a:pPr algn="ctr"/>
-              <a:r>
-                <a:rPr lang="en-US" sz="20000" b="0" cap="none" spc="0" dirty="0">
-                  <a:ln w="0"/>
-                  <a:gradFill flip="none" rotWithShape="1">
-                    <a:gsLst>
-                      <a:gs pos="0">
-                        <a:srgbClr val="008DD2"/>
-                      </a:gs>
-                      <a:gs pos="100000">
-                        <a:srgbClr val="FFCC00"/>
-                      </a:gs>
-                    </a:gsLst>
-                    <a:lin ang="0" scaled="1"/>
-                    <a:tileRect/>
-                  </a:gradFill>
-                  <a:effectLst>
-                    <a:outerShdw blurRad="38100" dist="19050" dir="2700000" algn="tl" rotWithShape="0">
-                      <a:schemeClr val="dk1">
-                        <a:alpha val="40000"/>
-                      </a:schemeClr>
-                    </a:outerShdw>
-                  </a:effectLst>
-                </a:rPr>
-                <a:t>X</a:t>
-              </a:r>
+              <a:endParaRPr lang="en-US" dirty="0"/>
             </a:p>
           </p:txBody>
         </p:sp>
+        <p:grpSp>
+          <p:nvGrpSpPr>
+            <p:cNvPr id="6" name="Group 5">
+              <a:extLst>
+                <a:ext uri="{FF2B5EF4-FFF2-40B4-BE49-F238E27FC236}">
+                  <a16:creationId xmlns:a16="http://schemas.microsoft.com/office/drawing/2014/main" id="{CFC9E548-A36A-DC29-5F6D-2BCCE6923E19}"/>
+                </a:ext>
+              </a:extLst>
+            </p:cNvPr>
+            <p:cNvGrpSpPr>
+              <a:grpSpLocks noChangeAspect="1"/>
+            </p:cNvGrpSpPr>
+            <p:nvPr/>
+          </p:nvGrpSpPr>
+          <p:grpSpPr>
+            <a:xfrm>
+              <a:off x="2630976" y="2500973"/>
+              <a:ext cx="6930048" cy="2743200"/>
+              <a:chOff x="320959" y="1143000"/>
+              <a:chExt cx="11550080" cy="4572000"/>
+            </a:xfrm>
+          </p:grpSpPr>
+          <p:grpSp>
+            <p:nvGrpSpPr>
+              <p:cNvPr id="2" name="Group 1">
+                <a:extLst>
+                  <a:ext uri="{FF2B5EF4-FFF2-40B4-BE49-F238E27FC236}">
+                    <a16:creationId xmlns:a16="http://schemas.microsoft.com/office/drawing/2014/main" id="{FC62AD55-3BDF-B946-1DB6-78022617BB37}"/>
+                  </a:ext>
+                </a:extLst>
+              </p:cNvPr>
+              <p:cNvGrpSpPr>
+                <a:grpSpLocks noChangeAspect="1"/>
+              </p:cNvGrpSpPr>
+              <p:nvPr/>
+            </p:nvGrpSpPr>
+            <p:grpSpPr>
+              <a:xfrm>
+                <a:off x="320959" y="1143000"/>
+                <a:ext cx="11550080" cy="4572000"/>
+                <a:chOff x="2071923" y="1783080"/>
+                <a:chExt cx="8316058" cy="3291840"/>
+              </a:xfrm>
+            </p:grpSpPr>
+            <p:pic>
+              <p:nvPicPr>
+                <p:cNvPr id="3" name="Picture 2" descr="A logo with a black background&#10;&#10;AI-generated content may be incorrect.">
+                  <a:extLst>
+                    <a:ext uri="{FF2B5EF4-FFF2-40B4-BE49-F238E27FC236}">
+                      <a16:creationId xmlns:a16="http://schemas.microsoft.com/office/drawing/2014/main" id="{394B999F-287E-B2F9-0F35-4D1B2AEBCE38}"/>
+                    </a:ext>
+                  </a:extLst>
+                </p:cNvPr>
+                <p:cNvPicPr>
+                  <a:picLocks noChangeAspect="1"/>
+                </p:cNvPicPr>
+                <p:nvPr/>
+              </p:nvPicPr>
+              <p:blipFill>
+                <a:blip r:embed="rId3">
+                  <a:extLst>
+                    <a:ext uri="{28A0092B-C50C-407E-A947-70E740481C1C}">
+                      <a14:useLocalDpi xmlns:a14="http://schemas.microsoft.com/office/drawing/2010/main" val="0"/>
+                    </a:ext>
+                  </a:extLst>
+                </a:blip>
+                <a:stretch>
+                  <a:fillRect/>
+                </a:stretch>
+              </p:blipFill>
+              <p:spPr>
+                <a:xfrm>
+                  <a:off x="2071923" y="1783080"/>
+                  <a:ext cx="3291840" cy="3291840"/>
+                </a:xfrm>
+                <a:prstGeom prst="rect">
+                  <a:avLst/>
+                </a:prstGeom>
+              </p:spPr>
+            </p:pic>
+            <p:pic>
+              <p:nvPicPr>
+                <p:cNvPr id="4" name="Picture 3" descr="A yellow exclamation mark on a black background&#10;&#10;AI-generated content may be incorrect.">
+                  <a:extLst>
+                    <a:ext uri="{FF2B5EF4-FFF2-40B4-BE49-F238E27FC236}">
+                      <a16:creationId xmlns:a16="http://schemas.microsoft.com/office/drawing/2014/main" id="{FCA77AC3-63A8-936B-CC10-A6E23E233ECF}"/>
+                    </a:ext>
+                  </a:extLst>
+                </p:cNvPr>
+                <p:cNvPicPr>
+                  <a:picLocks noChangeAspect="1"/>
+                </p:cNvPicPr>
+                <p:nvPr/>
+              </p:nvPicPr>
+              <p:blipFill>
+                <a:blip r:embed="rId4">
+                  <a:extLst>
+                    <a:ext uri="{28A0092B-C50C-407E-A947-70E740481C1C}">
+                      <a14:useLocalDpi xmlns:a14="http://schemas.microsoft.com/office/drawing/2010/main" val="0"/>
+                    </a:ext>
+                  </a:extLst>
+                </a:blip>
+                <a:stretch>
+                  <a:fillRect/>
+                </a:stretch>
+              </p:blipFill>
+              <p:spPr>
+                <a:xfrm>
+                  <a:off x="7096141" y="2057400"/>
+                  <a:ext cx="3291840" cy="2743200"/>
+                </a:xfrm>
+                <a:prstGeom prst="rect">
+                  <a:avLst/>
+                </a:prstGeom>
+              </p:spPr>
+            </p:pic>
+          </p:grpSp>
+          <p:sp>
+            <p:nvSpPr>
+              <p:cNvPr id="5" name="Rectangle 4">
+                <a:extLst>
+                  <a:ext uri="{FF2B5EF4-FFF2-40B4-BE49-F238E27FC236}">
+                    <a16:creationId xmlns:a16="http://schemas.microsoft.com/office/drawing/2014/main" id="{B2C7FD6F-9274-A97F-C97C-06C6FF3B35C3}"/>
+                  </a:ext>
+                </a:extLst>
+              </p:cNvPr>
+              <p:cNvSpPr/>
+              <p:nvPr/>
+            </p:nvSpPr>
+            <p:spPr>
+              <a:xfrm>
+                <a:off x="5232782" y="1843950"/>
+                <a:ext cx="1726435" cy="3231653"/>
+              </a:xfrm>
+              <a:prstGeom prst="rect">
+                <a:avLst/>
+              </a:prstGeom>
+              <a:noFill/>
+            </p:spPr>
+            <p:txBody>
+              <a:bodyPr wrap="none" lIns="91440" tIns="45720" rIns="91440" bIns="45720">
+                <a:spAutoFit/>
+              </a:bodyPr>
+              <a:lstStyle/>
+              <a:p>
+                <a:pPr algn="ctr"/>
+                <a:r>
+                  <a:rPr lang="en-US" sz="12000" b="0" cap="none" spc="0" dirty="0">
+                    <a:ln w="0"/>
+                    <a:gradFill flip="none" rotWithShape="1">
+                      <a:gsLst>
+                        <a:gs pos="0">
+                          <a:srgbClr val="008DD2"/>
+                        </a:gs>
+                        <a:gs pos="100000">
+                          <a:srgbClr val="FFCC00"/>
+                        </a:gs>
+                      </a:gsLst>
+                      <a:lin ang="0" scaled="1"/>
+                      <a:tileRect/>
+                    </a:gradFill>
+                    <a:effectLst>
+                      <a:outerShdw blurRad="38100" dist="19050" dir="2700000" algn="tl" rotWithShape="0">
+                        <a:schemeClr val="dk1">
+                          <a:alpha val="40000"/>
+                        </a:schemeClr>
+                      </a:outerShdw>
+                    </a:effectLst>
+                  </a:rPr>
+                  <a:t>X</a:t>
+                </a:r>
+              </a:p>
+            </p:txBody>
+          </p:sp>
+        </p:grpSp>
       </p:grpSp>
     </p:spTree>
     <p:extLst>
       <p:ext uri="{BB962C8B-B14F-4D97-AF65-F5344CB8AC3E}">
-        <p14:creationId xmlns:p14="http://schemas.microsoft.com/office/powerpoint/2010/main" val="2717747057"/>
+        <p14:creationId xmlns:p14="http://schemas.microsoft.com/office/powerpoint/2010/main" val="3518892920"/>
       </p:ext>
     </p:extLst>
   </p:cSld>
